--- a/synchronization_part_2/synchronization_part_2.pptx
+++ b/synchronization_part_2/synchronization_part_2.pptx
@@ -477,7 +477,7 @@
           <a:p>
             <a:fld id="{B9670FC7-431C-3445-825C-360F18AD9FB0}" type="datetimeFigureOut">
               <a:rPr lang="en-US" smtClean="0"/>
-              <a:t>7/15/26</a:t>
+              <a:t>9/15/26</a:t>
             </a:fld>
             <a:endParaRPr lang="en-US"/>
           </a:p>
@@ -17397,7 +17397,7 @@
             </a:br>
             <a:r>
               <a:rPr lang="en-US" dirty="0"/>
-              <a:t>- Both for part 1 and part 2</a:t>
+              <a:t>- This is for both lectures on synchronization</a:t>
             </a:r>
           </a:p>
         </p:txBody>
@@ -17421,25 +17421,23 @@
           <a:p>
             <a:r>
               <a:rPr lang="en-US" dirty="0"/>
-              <a:t>Chapter 2.4.1-2.4.6, </a:t>
+              <a:t>Chapter 2.3.7-2.3.9, 2.3.11, </a:t>
+            </a:r>
+            <a:r>
+              <a:rPr lang="en-GB" dirty="0"/>
+              <a:t>6.3, </a:t>
+            </a:r>
+            <a:r>
+              <a:rPr lang="en-US" dirty="0"/>
+              <a:t>2.4.1-2.4.6, </a:t>
             </a:r>
             <a:r>
               <a:rPr lang="en-GB" dirty="0"/>
               <a:t>6.1-6.2, 6.5-6.6, 6.7.3-6.7.4</a:t>
             </a:r>
             <a:r>
-              <a:rPr lang="en-US" dirty="0"/>
-              <a:t>; </a:t>
-            </a:r>
-          </a:p>
-          <a:p>
-            <a:r>
-              <a:rPr lang="en-US" dirty="0"/>
-              <a:t>Quicker reading, for awareness, of sections 2.3.7-2.3.9, 2.3.11, </a:t>
-            </a:r>
-            <a:r>
-              <a:rPr lang="en-GB"/>
-              <a:t>6.3</a:t>
+              <a:rPr lang="en-US"/>
+              <a:t>;</a:t>
             </a:r>
             <a:endParaRPr lang="en-US" dirty="0"/>
           </a:p>

--- a/synchronization_part_2/synchronization_part_2.pptx
+++ b/synchronization_part_2/synchronization_part_2.pptx
@@ -477,7 +477,7 @@
           <a:p>
             <a:fld id="{B9670FC7-431C-3445-825C-360F18AD9FB0}" type="datetimeFigureOut">
               <a:rPr lang="en-US" smtClean="0"/>
-              <a:t>9/15/26</a:t>
+              <a:t>9/21/26</a:t>
             </a:fld>
             <a:endParaRPr lang="en-US"/>
           </a:p>
@@ -1040,25 +1040,25 @@
           <a:p>
             <a:r>
               <a:rPr lang="en-US" dirty="0"/>
-              <a:t>Of course, we cannot remove the mutual exclusion, ensuring it is our goal, but we can eliminate one of the other 3.</a:t>
+              <a:t>Of course, we cannot remove the mutual exclusion, ensuring it is our goal, but we can break one of the other 3 conditions.</a:t>
             </a:r>
           </a:p>
           <a:p>
             <a:r>
               <a:rPr lang="en-US" dirty="0"/>
-              <a:t>We can eliminate the circular wait by making sure that resources are acquired in a certain order.</a:t>
+              <a:t>We can break the circular wait condition by making sure that resources are acquired in a certain order.</a:t>
             </a:r>
           </a:p>
           <a:p>
             <a:r>
               <a:rPr lang="en-US" dirty="0"/>
-              <a:t>We can eliminate the non-preemption, by having a thread releasing a resource if it cannot get the next one.</a:t>
+              <a:t>We can break the non-preemption condition, by having a thread releasing a resource if it cannot get the next one.</a:t>
             </a:r>
           </a:p>
           <a:p>
             <a:r>
               <a:rPr lang="en-US" dirty="0"/>
-              <a:t>Or, we can eliminate the hold and wait, making sure a thread either gets all its resources at once or none of it.</a:t>
+              <a:t>Or, we can break the hold and wait condition, making sure a thread either gets all its resources at once or none of them.</a:t>
             </a:r>
           </a:p>
         </p:txBody>
@@ -1175,7 +1175,7 @@
           <a:p>
             <a:r>
               <a:rPr lang="en-US" dirty="0"/>
-              <a:t>If you reflect about it, you will see that if we have 2 philosophers only one can eat at a time, if we have 3 philosophers only 1 can eat at a time, if we have 4 philosophers than 2 can eat in parallel (but they cannot be adjacent ones), and so on.</a:t>
+              <a:t>If you reflect about it, you will see that if we have 2 philosophers only one can eat at a time, if we have 3 philosophers only 1 can eat at a time, if we have 4 philosophers then 2 can eat in parallel (but they cannot be adjacent ones), and so on.</a:t>
             </a:r>
           </a:p>
           <a:p>
@@ -1373,8 +1373,22 @@
               <a:t>From our previous discussion, if mutual exclusion, hold and wait, no preemption and circular wait can happen </a:t>
             </a:r>
             <a:r>
-              <a:rPr lang="en-US" dirty="0" err="1"/>
-              <a:t>simultanously</a:t>
+              <a:rPr lang="en-US" sz="1200" kern="1200" dirty="0">
+                <a:solidFill>
+                  <a:schemeClr val="tx1"/>
+                </a:solidFill>
+                <a:effectLst/>
+                <a:latin typeface="+mn-lt"/>
+                <a:ea typeface="+mn-ea"/>
+                <a:cs typeface="+mn-cs"/>
+              </a:rPr>
+              <a:t>simultaneously</a:t>
+            </a:r>
+            <a:r>
+              <a:rPr lang="en-US" dirty="0">
+                <a:effectLst/>
+              </a:rPr>
+              <a:t> </a:t>
             </a:r>
             <a:r>
               <a:rPr lang="en-US" dirty="0"/>
@@ -1483,13 +1497,13 @@
           <a:p>
             <a:r>
               <a:rPr lang="en-US" dirty="0"/>
-              <a:t>Do we have circular waits? Indeed, as shown in this slide.</a:t>
+              <a:t>Do we have circular wait? Indeed, as shown in this slide.</a:t>
             </a:r>
           </a:p>
           <a:p>
             <a:r>
               <a:rPr lang="en-US" dirty="0"/>
-              <a:t>Hence, this solution is not valid, it can lead to a deadlock.</a:t>
+              <a:t>Hence, this solution is not valid and can lead to a deadlock.</a:t>
             </a:r>
           </a:p>
           <a:p>
@@ -1615,7 +1629,7 @@
           <a:p>
             <a:r>
               <a:rPr lang="en-US" dirty="0"/>
-              <a:t>Let's argument why we cannot have a circular wait in this case.</a:t>
+              <a:t>Let’s argue why we cannot have a circular wait in this case.</a:t>
             </a:r>
           </a:p>
         </p:txBody>
@@ -1702,7 +1716,7 @@
           <a:p>
             <a:r>
               <a:rPr lang="en-US" dirty="0"/>
-              <a:t>I am for simplicity assuming we only have 2 philosophers here, but you can extend this reasoning to 3 or more philosophers.</a:t>
+              <a:t>I am here assuming (for simplicity ) that we only have 2 philosophers, but you can extend this reasoning to 3 or more philosophers.</a:t>
             </a:r>
           </a:p>
           <a:p>
@@ -1801,7 +1815,7 @@
           <a:p>
             <a:r>
               <a:rPr lang="en-US" dirty="0"/>
-              <a:t>Let's say Philosopher 1 waits for chopstick 1[c], then it managed to get chopstick 0[c] . [c] But if it has chopstick 0 then philosopher 1 cannot have chopstick 1, which means philosopher 1 can eat.</a:t>
+              <a:t>Let's say Philosopher 1 waits for chopstick 1[c], then it managed to get chopstick 0[c] . [c] But if it has chopstick 0 then philosopher 0 cannot have chopstick 1, which means philosopher 1 can eat.</a:t>
             </a:r>
           </a:p>
           <a:p>
@@ -1925,7 +1939,15 @@
             </a:r>
             <a:r>
               <a:rPr lang="en-US" dirty="0" err="1"/>
-              <a:t>chopstick_structure</a:t>
+              <a:t>chopstick_</a:t>
+            </a:r>
+            <a:r>
+              <a:rPr lang="en-US" sz="1200" dirty="0" err="1">
+                <a:solidFill>
+                  <a:prstClr val="black"/>
+                </a:solidFill>
+              </a:rPr>
+              <a:t>struct</a:t>
             </a:r>
             <a:r>
               <a:rPr lang="en-US" dirty="0"/>
@@ -1941,7 +1963,15 @@
             </a:r>
             <a:r>
               <a:rPr lang="en-US" dirty="0" err="1"/>
-              <a:t>chopstick_structure</a:t>
+              <a:t>chopstick_</a:t>
+            </a:r>
+            <a:r>
+              <a:rPr lang="en-US" sz="1200" dirty="0" err="1">
+                <a:solidFill>
+                  <a:prstClr val="black"/>
+                </a:solidFill>
+              </a:rPr>
+              <a:t>struct</a:t>
             </a:r>
             <a:r>
               <a:rPr lang="en-US" dirty="0"/>
@@ -1963,7 +1993,15 @@
             </a:r>
             <a:r>
               <a:rPr lang="en-US" dirty="0" err="1"/>
-              <a:t>chopstick_structure</a:t>
+              <a:t>chopstick_</a:t>
+            </a:r>
+            <a:r>
+              <a:rPr lang="en-US" sz="1200" dirty="0" err="1">
+                <a:solidFill>
+                  <a:prstClr val="black"/>
+                </a:solidFill>
+              </a:rPr>
+              <a:t>struct</a:t>
             </a:r>
             <a:r>
               <a:rPr lang="en-US" dirty="0"/>
@@ -2030,7 +2068,7 @@
             </a:r>
             <a:r>
               <a:rPr lang="en-US" dirty="0"/>
-              <a:t> as longs as it does not find the available variable of the chopstick it is trying to lock set to true.</a:t>
+              <a:t> as long as it does not find the available variable of the chopstick it is trying to lock set to true.</a:t>
             </a:r>
           </a:p>
           <a:p>
@@ -2087,15 +2125,7 @@
           <a:p>
             <a:r>
               <a:rPr lang="en-US" dirty="0"/>
-              <a:t>If you look at this solution carefully, you can see a thread enters its critical section only if both chopsticks are available and, when a thread finds the first chopstick to be </a:t>
-            </a:r>
-            <a:r>
-              <a:rPr lang="en-US" dirty="0" err="1"/>
-              <a:t>availalbe</a:t>
-            </a:r>
-            <a:r>
-              <a:rPr lang="en-US" dirty="0"/>
-              <a:t> but not the second one, the first is set to available again, which means in the next iteration of loop the thread will try again to get both chopsticks.</a:t>
+              <a:t>If you look at this solution carefully, you can see a thread enters its critical section only if both chopsticks are available and, when a thread finds the first chopstick to be available but not the second one, the first is set to available again, which means in the next iteration of loop the thread will try again to get both chopsticks.</a:t>
             </a:r>
           </a:p>
         </p:txBody>
@@ -2208,15 +2238,7 @@
           <a:p>
             <a:r>
               <a:rPr lang="en-US" dirty="0"/>
-              <a:t>We have not discussed </a:t>
-            </a:r>
-            <a:r>
-              <a:rPr lang="en-US" dirty="0" err="1"/>
-              <a:t>livelocks</a:t>
-            </a:r>
-            <a:r>
-              <a:rPr lang="en-US" dirty="0"/>
-              <a:t> in details, but I just want to draw your attention on the fact that if there are two processes and if both processes do not manage to get the second chopstick it might happen that in some execution order (imagine the two processes are concurrently being executed on the same CPU) they both release the other chopstick and try again, and this try and retry can go on for an unbounded number of times.</a:t>
+              <a:t>We have not discussed in detail what a live lock is, but please note that if there are two processes and if both processes do not manage to get the second chopstick it might happen that in some execution order (imagine the two processes are concurrently being executed on the same CPU) they both release the other chopstick and try again, and this try and retry can go on for an unbounded number of times.</a:t>
             </a:r>
           </a:p>
         </p:txBody>
@@ -2301,16 +2323,6 @@
           <a:bodyPr/>
           <a:lstStyle/>
           <a:p>
-            <a:r>
-              <a:rPr lang="en-US" dirty="0"/>
-              <a:t>Bounded-buffer producer/consumer </a:t>
-            </a:r>
-            <a:r>
-              <a:rPr lang="en-US" dirty="0">
-                <a:sym typeface="Wingdings" pitchFamily="2" charset="2"/>
-              </a:rPr>
-              <a:t> can connect to pipes, to glue a bit things together</a:t>
-            </a:r>
             <a:endParaRPr lang="en-US" dirty="0"/>
           </a:p>
         </p:txBody>
@@ -2455,7 +2467,7 @@
             </a:r>
             <a:r>
               <a:rPr lang="en-US" dirty="0" err="1"/>
-              <a:t>entryCS</a:t>
+              <a:t>enterCS</a:t>
             </a:r>
             <a:r>
               <a:rPr lang="en-US" dirty="0"/>
@@ -2904,15 +2916,7 @@
           <a:p>
             <a:r>
               <a:rPr lang="en-US" dirty="0"/>
-              <a:t>I ask you to formally reason about why this solution is valid, I am only doing a rapid discussion. For mutual exclusion, you can conclude that if a thread enters its critical section, then that thread is sure no other thread has a lower number. When the thread is in, can another thread obtain a lower number and enter the critical section? No, </a:t>
-            </a:r>
-            <a:r>
-              <a:rPr lang="en-US" dirty="0" err="1"/>
-              <a:t>beacuse</a:t>
-            </a:r>
-            <a:r>
-              <a:rPr lang="en-US" dirty="0"/>
-              <a:t> the number is always the max of all threads + 1, so it will be at least +1 compared to the thread that is running its critical section.</a:t>
+              <a:t>I ask you to formally reason about why this solution is valid, I am only doing a rapid discussion. For mutual exclusion, you can conclude that if a thread enters its critical section, then that thread is sure no other thread has a lower number. When the thread is in, can another thread obtain a lower number and enter the critical section? No, because the number is always the max of all threads + 1, so it will be at least +1 compared to the thread that is running its critical section.</a:t>
             </a:r>
           </a:p>
           <a:p>
@@ -3203,7 +3207,7 @@
           <a:p>
             <a:r>
               <a:rPr lang="en-US" noProof="0" dirty="0"/>
-              <a:t>Once the critical section is over (i.e., the portion in which the writer writes to the shared resource), the exit section can send a signal about the fact that no one is accessing the object anymore, and such a signal can be consumed by both a writer or a reader.</a:t>
+              <a:t>Once the critical section is over (i.e., the portion in which the writer writes to the shared resource), the exit section can send a signal about the fact that no one is accessing the object anymore, and such a signal can be consumed by either a writer or a reader.</a:t>
             </a:r>
           </a:p>
           <a:p>
@@ -3653,7 +3657,7 @@
           <a:p>
             <a:r>
               <a:rPr lang="en-US" dirty="0"/>
-              <a:t>In this graph, we have two types of vertexes: resources and processes (this is a bipartite graph).</a:t>
+              <a:t>In this graph, we have two types of vertices: resources and processes (this is a bipartite graph).</a:t>
             </a:r>
           </a:p>
           <a:p>
@@ -4135,15 +4139,7 @@
           <a:p>
             <a:r>
               <a:rPr lang="en-US" dirty="0"/>
-              <a:t>an array called available, that in position j contains the number of instances </a:t>
-            </a:r>
-            <a:r>
-              <a:rPr lang="en-US"/>
-              <a:t>that are still </a:t>
-            </a:r>
-            <a:r>
-              <a:rPr lang="en-US" dirty="0"/>
-              <a:t>available for resource j.</a:t>
+              <a:t>an array called available, that in position j contains the number of instances that are still available for resource j.</a:t>
             </a:r>
           </a:p>
           <a:p>
@@ -4522,7 +4518,7 @@
           <a:p>
             <a:r>
               <a:rPr lang="en-US" noProof="0" dirty="0"/>
-              <a:t>For the consumer thread, a while loop should precede the locking of its critical section to make sure there are actually elements in the queue. </a:t>
+              <a:t>For the consumer thread, a semaphore wait should precede the locking of its critical section to make sure there are actually elements in the queue. </a:t>
             </a:r>
           </a:p>
           <a:p>
@@ -4669,7 +4665,7 @@
             </a:r>
             <a:r>
               <a:rPr lang="sv-SE" dirty="0"/>
-              <a:t>, is </a:t>
+              <a:t>, it is </a:t>
             </a:r>
             <a:r>
               <a:rPr lang="sv-SE" dirty="0" err="1"/>
@@ -8670,7 +8666,7 @@
         <p:spPr>
           <a:xfrm>
             <a:off x="422623" y="906459"/>
-            <a:ext cx="7525307" cy="1741871"/>
+            <a:ext cx="7525307" cy="2193398"/>
           </a:xfrm>
           <a:noFill/>
           <a:ln>
@@ -8694,13 +8690,13 @@
         </p:style>
         <p:txBody>
           <a:bodyPr>
-            <a:normAutofit fontScale="85000" lnSpcReduction="10000"/>
+            <a:normAutofit fontScale="85000" lnSpcReduction="20000"/>
           </a:bodyPr>
           <a:lstStyle/>
           <a:p>
             <a:r>
               <a:rPr lang="en-US" dirty="0"/>
-              <a:t>Processes/threads  need  resources (e.g., memory pages, printer, access to parts of shared data structure,  etc.)</a:t>
+              <a:t>Processes/threads  need  resources (e.g., memory pages, a printer, access to parts of a shared data structure,  etc.)</a:t>
             </a:r>
           </a:p>
           <a:p>
@@ -8713,7 +8709,13 @@
           <a:p>
             <a:r>
               <a:rPr lang="en-US" dirty="0"/>
-              <a:t>a human analogy: process = go fishing; needed resources: boat, fishing-rod</a:t>
+              <a:t>a human analogy: process = go fishing; needed resources: boat, fishing rod</a:t>
+            </a:r>
+          </a:p>
+          <a:p>
+            <a:r>
+              <a:rPr lang="en-US" dirty="0"/>
+              <a:t>Mutual exclusion is needed for resources that cannot be shared</a:t>
             </a:r>
           </a:p>
         </p:txBody>
@@ -8792,7 +8794,7 @@
         </p:blipFill>
         <p:spPr>
           <a:xfrm>
-            <a:off x="2735476" y="2736853"/>
+            <a:off x="3425759" y="3504624"/>
             <a:ext cx="571714" cy="740036"/>
           </a:xfrm>
           <a:prstGeom prst="rect">
@@ -8896,7 +8898,7 @@
         </p:nvSpPr>
         <p:spPr>
           <a:xfrm>
-            <a:off x="1263362" y="2893986"/>
+            <a:off x="1953645" y="3661757"/>
             <a:ext cx="425770" cy="425770"/>
           </a:xfrm>
           <a:prstGeom prst="ellipse">
@@ -8945,7 +8947,7 @@
         </p:nvSpPr>
         <p:spPr>
           <a:xfrm>
-            <a:off x="3442088" y="2893986"/>
+            <a:off x="4132371" y="3661757"/>
             <a:ext cx="425770" cy="425770"/>
           </a:xfrm>
           <a:prstGeom prst="ellipse">
@@ -9008,7 +9010,7 @@
         </p:blipFill>
         <p:spPr>
           <a:xfrm>
-            <a:off x="1824029" y="2661229"/>
+            <a:off x="2514312" y="3429000"/>
             <a:ext cx="776550" cy="891284"/>
           </a:xfrm>
           <a:prstGeom prst="rect">
@@ -9641,55 +9643,7 @@
                   <a:prstClr val="black"/>
                 </a:solidFill>
               </a:rPr>
-              <a:t>A solution must </a:t>
-            </a:r>
-            <a:r>
-              <a:rPr lang="en-US" sz="1800" dirty="0">
-                <a:solidFill>
-                  <a:srgbClr val="C00000"/>
-                </a:solidFill>
-              </a:rPr>
-              <a:t>provide</a:t>
-            </a:r>
-            <a:r>
-              <a:rPr lang="en-US" sz="1800" dirty="0">
-                <a:solidFill>
-                  <a:prstClr val="black"/>
-                </a:solidFill>
-              </a:rPr>
-              <a:t> the </a:t>
-            </a:r>
-            <a:r>
-              <a:rPr lang="en-US" sz="1800" dirty="0">
-                <a:solidFill>
-                  <a:srgbClr val="C00000"/>
-                </a:solidFill>
-              </a:rPr>
-              <a:t>entry</a:t>
-            </a:r>
-            <a:r>
-              <a:rPr lang="en-US" sz="1800" dirty="0">
-                <a:solidFill>
-                  <a:prstClr val="black"/>
-                </a:solidFill>
-              </a:rPr>
-              <a:t> and </a:t>
-            </a:r>
-            <a:r>
-              <a:rPr lang="en-US" sz="1800" dirty="0">
-                <a:solidFill>
-                  <a:srgbClr val="C00000"/>
-                </a:solidFill>
-              </a:rPr>
-              <a:t>exit</a:t>
-            </a:r>
-            <a:r>
-              <a:rPr lang="en-US" sz="1800" dirty="0">
-                <a:solidFill>
-                  <a:prstClr val="black"/>
-                </a:solidFill>
-              </a:rPr>
-              <a:t> sections</a:t>
+              <a:t>A solution for acquiring/releasing all the needed resources</a:t>
             </a:r>
           </a:p>
           <a:p>
@@ -9702,7 +9656,7 @@
                   <a:prstClr val="black"/>
                 </a:solidFill>
               </a:rPr>
-              <a:t>It must </a:t>
+              <a:t>must </a:t>
             </a:r>
             <a:r>
               <a:rPr lang="en-US" sz="1800" dirty="0">
@@ -9710,7 +9664,55 @@
                   <a:srgbClr val="C00000"/>
                 </a:solidFill>
               </a:rPr>
-              <a:t>ensure</a:t>
+              <a:t>provide</a:t>
+            </a:r>
+            <a:r>
+              <a:rPr lang="en-US" sz="1800" dirty="0">
+                <a:solidFill>
+                  <a:prstClr val="black"/>
+                </a:solidFill>
+              </a:rPr>
+              <a:t> the </a:t>
+            </a:r>
+            <a:r>
+              <a:rPr lang="en-US" sz="1800" dirty="0">
+                <a:solidFill>
+                  <a:srgbClr val="C00000"/>
+                </a:solidFill>
+              </a:rPr>
+              <a:t>entry</a:t>
+            </a:r>
+            <a:r>
+              <a:rPr lang="en-US" sz="1800" dirty="0">
+                <a:solidFill>
+                  <a:prstClr val="black"/>
+                </a:solidFill>
+              </a:rPr>
+              <a:t> and </a:t>
+            </a:r>
+            <a:r>
+              <a:rPr lang="en-US" sz="1800" dirty="0">
+                <a:solidFill>
+                  <a:srgbClr val="C00000"/>
+                </a:solidFill>
+              </a:rPr>
+              <a:t>exit</a:t>
+            </a:r>
+            <a:r>
+              <a:rPr lang="en-US" sz="1800" dirty="0">
+                <a:solidFill>
+                  <a:prstClr val="black"/>
+                </a:solidFill>
+              </a:rPr>
+              <a:t> sections </a:t>
+            </a:r>
+            <a:r>
+              <a:rPr lang="en-US" sz="1800" dirty="0">
+                <a:solidFill>
+                  <a:srgbClr val="C00000"/>
+                </a:solidFill>
+              </a:rPr>
+              <a:t>ensuring</a:t>
             </a:r>
             <a:r>
               <a:rPr lang="en-US" sz="1800" dirty="0">
@@ -9732,7 +9734,15 @@
                   <a:prstClr val="black"/>
                 </a:solidFill>
               </a:rPr>
-              <a:t>Acquire/Release all the needed resources</a:t>
+              <a:t>Mutual Exclusion</a:t>
+            </a:r>
+            <a:r>
+              <a:rPr lang="en-US" sz="1800" dirty="0">
+                <a:solidFill>
+                  <a:prstClr val="black"/>
+                </a:solidFill>
+              </a:rPr>
+              <a:t>.</a:t>
             </a:r>
           </a:p>
           <a:p>
@@ -9746,15 +9756,15 @@
                   <a:prstClr val="black"/>
                 </a:solidFill>
               </a:rPr>
-              <a:t>Mutual Exclusion</a:t>
-            </a:r>
-            <a:r>
-              <a:rPr lang="en-US" sz="1800" dirty="0">
+              <a:t>Progress: </a:t>
+            </a:r>
+            <a:r>
+              <a:rPr lang="en-US" sz="1800" b="1" u="sng" dirty="0">
                 <a:solidFill>
                   <a:prstClr val="black"/>
                 </a:solidFill>
               </a:rPr>
-              <a:t>.</a:t>
+              <a:t>no deadlock</a:t>
             </a:r>
           </a:p>
           <a:p>
@@ -9768,29 +9778,7 @@
                   <a:prstClr val="black"/>
                 </a:solidFill>
               </a:rPr>
-              <a:t>Progress: </a:t>
-            </a:r>
-            <a:r>
-              <a:rPr lang="en-US" sz="1800" b="1" u="sng" dirty="0">
-                <a:solidFill>
-                  <a:prstClr val="black"/>
-                </a:solidFill>
-              </a:rPr>
-              <a:t>no deadlock</a:t>
-            </a:r>
-          </a:p>
-          <a:p>
-            <a:pPr>
-              <a:buFontTx/>
-              <a:buAutoNum type="arabicPeriod"/>
-            </a:pPr>
-            <a:r>
-              <a:rPr lang="en-US" sz="1800" b="1" dirty="0">
-                <a:solidFill>
-                  <a:prstClr val="black"/>
-                </a:solidFill>
-              </a:rPr>
-              <a:t>Fairness (e.g., Bounded Waiting , no starvation</a:t>
+              <a:t>Fairness (e.g., Bounded Waiting, no starvation</a:t>
             </a:r>
             <a:r>
               <a:rPr lang="en-US" sz="1800" dirty="0">
@@ -10144,7 +10132,7 @@
                   <a:prstClr val="black"/>
                 </a:solidFill>
               </a:rPr>
-              <a:t>A set of processes/threads  blocking each-other  so that none of them can proceed:</a:t>
+              <a:t>A set of processes/threads  blocking each other  so that none of them can proceed:</a:t>
             </a:r>
           </a:p>
           <a:p>
@@ -10283,7 +10271,7 @@
               <a:rPr lang="en-US" sz="2400" dirty="0">
                 <a:latin typeface="+mn-lt"/>
               </a:rPr>
-              <a:t>[Coffman et al 1971] </a:t>
+              <a:t>[Coffman et al., 1971] </a:t>
             </a:r>
           </a:p>
         </p:txBody>
@@ -10354,7 +10342,7 @@
             </a:r>
             <a:r>
               <a:rPr lang="en-US" sz="2000" dirty="0"/>
-              <a:t>only one process at a time can use a resource.</a:t>
+              <a:t>only one process at a time can use a resource (that is not shareable).</a:t>
             </a:r>
             <a:endParaRPr lang="en-US" sz="2000" b="1" dirty="0">
               <a:solidFill>
@@ -10422,19 +10410,7 @@
             </a:r>
             <a:r>
               <a:rPr lang="en-US" sz="2000" dirty="0"/>
-              <a:t>a resource can only be released</a:t>
-            </a:r>
-            <a:r>
-              <a:rPr lang="en-US" sz="2000" dirty="0">
-                <a:solidFill>
-                  <a:schemeClr val="accent2"/>
-                </a:solidFill>
-              </a:rPr>
-              <a:t> </a:t>
-            </a:r>
-            <a:r>
-              <a:rPr lang="en-US" sz="2000" dirty="0"/>
-              <a:t>by the process holding it, after that process has completed its task.</a:t>
+              <a:t>a resource need not be held until the entire task is complete; it is released voluntarily after the process finishes using it.</a:t>
             </a:r>
             <a:endParaRPr lang="en-US" sz="2000" b="1" dirty="0">
               <a:solidFill>
@@ -10468,7 +10444,7 @@
             </a:r>
             <a:r>
               <a:rPr lang="en-US" sz="2000" dirty="0"/>
-              <a:t>there exists a circular chain of 2 or more blocked processes, each waiting for a resource held by the next proc. in the chain </a:t>
+              <a:t>there exists a circular chain of 2 or more blocked processes, each waiting for a resource held by the next process in the chain </a:t>
             </a:r>
           </a:p>
         </p:txBody>
@@ -11227,6 +11203,251 @@
           </a:p>
         </p:txBody>
       </p:sp>
+      <p:sp>
+        <p:nvSpPr>
+          <p:cNvPr id="14" name="Rectangle 3">
+            <a:extLst>
+              <a:ext uri="{FF2B5EF4-FFF2-40B4-BE49-F238E27FC236}">
+                <a16:creationId xmlns:a16="http://schemas.microsoft.com/office/drawing/2014/main" id="{A65D33B1-5103-7E6F-1AEE-E29C577F3530}"/>
+              </a:ext>
+            </a:extLst>
+          </p:cNvPr>
+          <p:cNvSpPr txBox="1">
+            <a:spLocks noChangeArrowheads="1"/>
+          </p:cNvSpPr>
+          <p:nvPr/>
+        </p:nvSpPr>
+        <p:spPr>
+          <a:xfrm>
+            <a:off x="838200" y="5752871"/>
+            <a:ext cx="10592279" cy="400110"/>
+          </a:xfrm>
+          <a:prstGeom prst="rect">
+            <a:avLst/>
+          </a:prstGeom>
+          <a:noFill/>
+          <a:ln w="38100" cap="flat" cmpd="sng" algn="ctr">
+            <a:solidFill>
+              <a:srgbClr val="FF0000"/>
+            </a:solidFill>
+            <a:prstDash val="solid"/>
+            <a:miter lim="800000"/>
+          </a:ln>
+        </p:spPr>
+        <p:style>
+          <a:lnRef idx="1">
+            <a:schemeClr val="dk1"/>
+          </a:lnRef>
+          <a:fillRef idx="2">
+            <a:schemeClr val="dk1"/>
+          </a:fillRef>
+          <a:effectRef idx="1">
+            <a:schemeClr val="dk1"/>
+          </a:effectRef>
+          <a:fontRef idx="minor">
+            <a:schemeClr val="dk1"/>
+          </a:fontRef>
+        </p:style>
+        <p:txBody>
+          <a:bodyPr vert="horz" lIns="91440" tIns="45720" rIns="91440" bIns="45720" rtlCol="0">
+            <a:normAutofit/>
+          </a:bodyPr>
+          <a:lstStyle>
+            <a:lvl1pPr marL="228600" indent="-228600" algn="l" defTabSz="914400" rtl="0" eaLnBrk="1" latinLnBrk="0" hangingPunct="1">
+              <a:lnSpc>
+                <a:spcPct val="90000"/>
+              </a:lnSpc>
+              <a:spcBef>
+                <a:spcPts val="1000"/>
+              </a:spcBef>
+              <a:buFont typeface="Arial" panose="020B0604020202020204" pitchFamily="34" charset="0"/>
+              <a:buChar char="•"/>
+              <a:defRPr sz="2800" kern="1200">
+                <a:solidFill>
+                  <a:schemeClr val="dk1"/>
+                </a:solidFill>
+                <a:latin typeface="+mn-lt"/>
+                <a:ea typeface="+mn-ea"/>
+                <a:cs typeface="+mn-cs"/>
+              </a:defRPr>
+            </a:lvl1pPr>
+            <a:lvl2pPr marL="685800" indent="-228600" algn="l" defTabSz="914400" rtl="0" eaLnBrk="1" latinLnBrk="0" hangingPunct="1">
+              <a:lnSpc>
+                <a:spcPct val="90000"/>
+              </a:lnSpc>
+              <a:spcBef>
+                <a:spcPts val="500"/>
+              </a:spcBef>
+              <a:buFont typeface="Arial" panose="020B0604020202020204" pitchFamily="34" charset="0"/>
+              <a:buChar char="•"/>
+              <a:defRPr sz="2400" kern="1200">
+                <a:solidFill>
+                  <a:schemeClr val="dk1"/>
+                </a:solidFill>
+                <a:latin typeface="+mn-lt"/>
+                <a:ea typeface="+mn-ea"/>
+                <a:cs typeface="+mn-cs"/>
+              </a:defRPr>
+            </a:lvl2pPr>
+            <a:lvl3pPr marL="1143000" indent="-228600" algn="l" defTabSz="914400" rtl="0" eaLnBrk="1" latinLnBrk="0" hangingPunct="1">
+              <a:lnSpc>
+                <a:spcPct val="90000"/>
+              </a:lnSpc>
+              <a:spcBef>
+                <a:spcPts val="500"/>
+              </a:spcBef>
+              <a:buFont typeface="Arial" panose="020B0604020202020204" pitchFamily="34" charset="0"/>
+              <a:buChar char="•"/>
+              <a:defRPr sz="2000" kern="1200">
+                <a:solidFill>
+                  <a:schemeClr val="dk1"/>
+                </a:solidFill>
+                <a:latin typeface="+mn-lt"/>
+                <a:ea typeface="+mn-ea"/>
+                <a:cs typeface="+mn-cs"/>
+              </a:defRPr>
+            </a:lvl3pPr>
+            <a:lvl4pPr marL="1600200" indent="-228600" algn="l" defTabSz="914400" rtl="0" eaLnBrk="1" latinLnBrk="0" hangingPunct="1">
+              <a:lnSpc>
+                <a:spcPct val="90000"/>
+              </a:lnSpc>
+              <a:spcBef>
+                <a:spcPts val="500"/>
+              </a:spcBef>
+              <a:buFont typeface="Arial" panose="020B0604020202020204" pitchFamily="34" charset="0"/>
+              <a:buChar char="•"/>
+              <a:defRPr sz="1800" kern="1200">
+                <a:solidFill>
+                  <a:schemeClr val="dk1"/>
+                </a:solidFill>
+                <a:latin typeface="+mn-lt"/>
+                <a:ea typeface="+mn-ea"/>
+                <a:cs typeface="+mn-cs"/>
+              </a:defRPr>
+            </a:lvl4pPr>
+            <a:lvl5pPr marL="2057400" indent="-228600" algn="l" defTabSz="914400" rtl="0" eaLnBrk="1" latinLnBrk="0" hangingPunct="1">
+              <a:lnSpc>
+                <a:spcPct val="90000"/>
+              </a:lnSpc>
+              <a:spcBef>
+                <a:spcPts val="500"/>
+              </a:spcBef>
+              <a:buFont typeface="Arial" panose="020B0604020202020204" pitchFamily="34" charset="0"/>
+              <a:buChar char="•"/>
+              <a:defRPr sz="1800" kern="1200">
+                <a:solidFill>
+                  <a:schemeClr val="dk1"/>
+                </a:solidFill>
+                <a:latin typeface="+mn-lt"/>
+                <a:ea typeface="+mn-ea"/>
+                <a:cs typeface="+mn-cs"/>
+              </a:defRPr>
+            </a:lvl5pPr>
+            <a:lvl6pPr marL="2514600" indent="-228600" algn="l" defTabSz="914400" rtl="0" eaLnBrk="1" latinLnBrk="0" hangingPunct="1">
+              <a:lnSpc>
+                <a:spcPct val="90000"/>
+              </a:lnSpc>
+              <a:spcBef>
+                <a:spcPts val="500"/>
+              </a:spcBef>
+              <a:buFont typeface="Arial" panose="020B0604020202020204" pitchFamily="34" charset="0"/>
+              <a:buChar char="•"/>
+              <a:defRPr sz="1800" kern="1200">
+                <a:solidFill>
+                  <a:schemeClr val="dk1"/>
+                </a:solidFill>
+                <a:latin typeface="+mn-lt"/>
+                <a:ea typeface="+mn-ea"/>
+                <a:cs typeface="+mn-cs"/>
+              </a:defRPr>
+            </a:lvl6pPr>
+            <a:lvl7pPr marL="2971800" indent="-228600" algn="l" defTabSz="914400" rtl="0" eaLnBrk="1" latinLnBrk="0" hangingPunct="1">
+              <a:lnSpc>
+                <a:spcPct val="90000"/>
+              </a:lnSpc>
+              <a:spcBef>
+                <a:spcPts val="500"/>
+              </a:spcBef>
+              <a:buFont typeface="Arial" panose="020B0604020202020204" pitchFamily="34" charset="0"/>
+              <a:buChar char="•"/>
+              <a:defRPr sz="1800" kern="1200">
+                <a:solidFill>
+                  <a:schemeClr val="dk1"/>
+                </a:solidFill>
+                <a:latin typeface="+mn-lt"/>
+                <a:ea typeface="+mn-ea"/>
+                <a:cs typeface="+mn-cs"/>
+              </a:defRPr>
+            </a:lvl7pPr>
+            <a:lvl8pPr marL="3429000" indent="-228600" algn="l" defTabSz="914400" rtl="0" eaLnBrk="1" latinLnBrk="0" hangingPunct="1">
+              <a:lnSpc>
+                <a:spcPct val="90000"/>
+              </a:lnSpc>
+              <a:spcBef>
+                <a:spcPts val="500"/>
+              </a:spcBef>
+              <a:buFont typeface="Arial" panose="020B0604020202020204" pitchFamily="34" charset="0"/>
+              <a:buChar char="•"/>
+              <a:defRPr sz="1800" kern="1200">
+                <a:solidFill>
+                  <a:schemeClr val="dk1"/>
+                </a:solidFill>
+                <a:latin typeface="+mn-lt"/>
+                <a:ea typeface="+mn-ea"/>
+                <a:cs typeface="+mn-cs"/>
+              </a:defRPr>
+            </a:lvl8pPr>
+            <a:lvl9pPr marL="3886200" indent="-228600" algn="l" defTabSz="914400" rtl="0" eaLnBrk="1" latinLnBrk="0" hangingPunct="1">
+              <a:lnSpc>
+                <a:spcPct val="90000"/>
+              </a:lnSpc>
+              <a:spcBef>
+                <a:spcPts val="500"/>
+              </a:spcBef>
+              <a:buFont typeface="Arial" panose="020B0604020202020204" pitchFamily="34" charset="0"/>
+              <a:buChar char="•"/>
+              <a:defRPr sz="1800" kern="1200">
+                <a:solidFill>
+                  <a:schemeClr val="dk1"/>
+                </a:solidFill>
+                <a:latin typeface="+mn-lt"/>
+                <a:ea typeface="+mn-ea"/>
+                <a:cs typeface="+mn-cs"/>
+              </a:defRPr>
+            </a:lvl9pPr>
+          </a:lstStyle>
+          <a:p>
+            <a:pPr marL="0" indent="0">
+              <a:buNone/>
+            </a:pPr>
+            <a:r>
+              <a:rPr lang="en-US" sz="2000" b="1" dirty="0">
+                <a:solidFill>
+                  <a:srgbClr val="C00000"/>
+                </a:solidFill>
+              </a:rPr>
+              <a:t>NOTE:</a:t>
+            </a:r>
+            <a:r>
+              <a:rPr lang="en-US" sz="2000" dirty="0">
+                <a:solidFill>
+                  <a:srgbClr val="C00000"/>
+                </a:solidFill>
+              </a:rPr>
+              <a:t>  </a:t>
+            </a:r>
+            <a:r>
+              <a:rPr lang="en-US" sz="2000" dirty="0"/>
+              <a:t>we are talking about preemption of resources, this is not the process scheduling preemption</a:t>
+            </a:r>
+            <a:endParaRPr lang="en-US" sz="2000" b="1" dirty="0">
+              <a:solidFill>
+                <a:srgbClr val="C00000"/>
+              </a:solidFill>
+            </a:endParaRPr>
+          </a:p>
+        </p:txBody>
+      </p:sp>
     </p:spTree>
     <p:extLst>
       <p:ext uri="{BB962C8B-B14F-4D97-AF65-F5344CB8AC3E}">
@@ -11394,7 +11615,7 @@
             </a:r>
             <a:r>
               <a:rPr lang="en-US" sz="2000" dirty="0"/>
-              <a:t>only one process at a time can use a resource.</a:t>
+              <a:t>only one process at a time can use a resource (that is not shareable).</a:t>
             </a:r>
             <a:endParaRPr lang="en-US" sz="2000" b="1" dirty="0">
               <a:solidFill>
@@ -11517,7 +11738,7 @@
             </a:r>
             <a:r>
               <a:rPr lang="en-US" sz="2000" dirty="0"/>
-              <a:t>there exists a circular chain of 2 or more blocked processes, each waiting for a resource held by the next proc. in the chain. </a:t>
+              <a:t>there exists a circular chain of 2 or more blocked processes, each waiting for a resource held by the next process in the chain. </a:t>
             </a:r>
             <a:r>
               <a:rPr lang="en-US" sz="2000" b="1" dirty="0">
@@ -12394,7 +12615,7 @@
                   </a:schemeClr>
                 </a:solidFill>
               </a:rPr>
-              <a:t>without circular wait</a:t>
+              <a:t>Breaking the circular wait condition</a:t>
             </a:r>
           </a:p>
           <a:p>
@@ -12407,7 +12628,7 @@
                   </a:schemeClr>
                 </a:solidFill>
               </a:rPr>
-              <a:t>without no-preemption</a:t>
+              <a:t>Breaking the no-preemption condition</a:t>
             </a:r>
           </a:p>
           <a:p>
@@ -12420,7 +12641,7 @@
                   </a:schemeClr>
                 </a:solidFill>
               </a:rPr>
-              <a:t>without hold-and-wait</a:t>
+              <a:t>Breaking the hold-and-wait condition </a:t>
             </a:r>
           </a:p>
           <a:p>
@@ -12634,7 +12855,7 @@
             </a:r>
             <a:r>
               <a:rPr lang="en-US" sz="2200" dirty="0"/>
-              <a:t>, when hungry, needs both left &amp; right chopstick, in order to eat </a:t>
+              <a:t>, when hungry, needs both left &amp; right chopsticks, in order to eat </a:t>
             </a:r>
           </a:p>
         </p:txBody>
@@ -13171,7 +13392,7 @@
                   </a:schemeClr>
                 </a:solidFill>
               </a:rPr>
-              <a:t>Dining philosophers [Dijkstra65]</a:t>
+              <a:t>Dining philosophers [Dijkstra, 1965]</a:t>
             </a:r>
             <a:endParaRPr lang="sv-SE" sz="3600" b="1" dirty="0">
               <a:solidFill>
@@ -13375,7 +13596,7 @@
                   <a:prstClr val="black"/>
                 </a:solidFill>
               </a:rPr>
-              <a:t>Shared var c[0..n-1]: bin-semaphore </a:t>
+              <a:t>Shared var c[0..n-1]: binary semaphore </a:t>
             </a:r>
             <a:r>
               <a:rPr lang="en-US" sz="2000" dirty="0">
@@ -13385,27 +13606,7 @@
                   </a:schemeClr>
                 </a:solidFill>
               </a:rPr>
-              <a:t>// one for each chopstick; </a:t>
-            </a:r>
-            <a:r>
-              <a:rPr lang="en-US" sz="2000" dirty="0" err="1">
-                <a:solidFill>
-                  <a:schemeClr val="bg1">
-                    <a:lumMod val="50000"/>
-                  </a:schemeClr>
-                </a:solidFill>
-              </a:rPr>
-              <a:t>init</a:t>
-            </a:r>
-            <a:r>
-              <a:rPr lang="en-US" sz="2000" dirty="0">
-                <a:solidFill>
-                  <a:schemeClr val="bg1">
-                    <a:lumMod val="50000"/>
-                  </a:schemeClr>
-                </a:solidFill>
-              </a:rPr>
-              <a:t> all 1 </a:t>
+              <a:t>// one for each chopstick; initially all set to 1 </a:t>
             </a:r>
           </a:p>
           <a:p>
@@ -13493,12 +13694,16 @@
               <a:t>	</a:t>
             </a:r>
             <a:r>
+              <a:rPr lang="en-US" sz="2000" dirty="0"/>
+              <a:t>w</a:t>
+            </a:r>
+            <a:r>
               <a:rPr lang="en-US" sz="2000" dirty="0">
                 <a:solidFill>
                   <a:schemeClr val="tx1"/>
                 </a:solidFill>
               </a:rPr>
-              <a:t>Wait </a:t>
+              <a:t>ait </a:t>
             </a:r>
             <a:r>
               <a:rPr lang="en-US" sz="2000" dirty="0"/>
@@ -13555,7 +13760,7 @@
             </a:pPr>
             <a:r>
               <a:rPr lang="en-US" sz="2000" dirty="0"/>
-              <a:t>	</a:t>
+              <a:t>	w</a:t>
             </a:r>
             <a:r>
               <a:rPr lang="en-US" sz="2000" dirty="0">
@@ -13563,7 +13768,7 @@
                   <a:schemeClr val="tx1"/>
                 </a:solidFill>
               </a:rPr>
-              <a:t>Wait </a:t>
+              <a:t>ait </a:t>
             </a:r>
             <a:r>
               <a:rPr lang="en-US" sz="2000" dirty="0"/>
@@ -13641,7 +13846,19 @@
                   <a:schemeClr val="tx1"/>
                 </a:solidFill>
               </a:rPr>
-              <a:t>	Signal </a:t>
+              <a:t>	</a:t>
+            </a:r>
+            <a:r>
+              <a:rPr lang="en-US" sz="2000" dirty="0"/>
+              <a:t>si</a:t>
+            </a:r>
+            <a:r>
+              <a:rPr lang="en-US" sz="2000" dirty="0">
+                <a:solidFill>
+                  <a:schemeClr val="tx1"/>
+                </a:solidFill>
+              </a:rPr>
+              <a:t>gnal </a:t>
             </a:r>
             <a:r>
               <a:rPr lang="en-US" sz="2000" dirty="0"/>
@@ -13706,7 +13923,7 @@
             </a:pPr>
             <a:r>
               <a:rPr lang="en-US" sz="2000" dirty="0"/>
-              <a:t>	</a:t>
+              <a:t>	s</a:t>
             </a:r>
             <a:r>
               <a:rPr lang="en-US" sz="2000" dirty="0">
@@ -13714,7 +13931,7 @@
                   <a:schemeClr val="tx1"/>
                 </a:solidFill>
               </a:rPr>
-              <a:t>Signal </a:t>
+              <a:t>ignal </a:t>
             </a:r>
             <a:r>
               <a:rPr lang="en-US" sz="2000" dirty="0"/>
@@ -13736,7 +13953,7 @@
                   </a:schemeClr>
                 </a:solidFill>
               </a:rPr>
-              <a:t>leave right chopstick</a:t>
+              <a:t>// leave right chopstick</a:t>
             </a:r>
           </a:p>
           <a:p>
@@ -17180,15 +17397,8 @@
             <a:pPr lvl="1"/>
             <a:r>
               <a:rPr lang="en-US" dirty="0"/>
-              <a:t>without circular wait</a:t>
-            </a:r>
-            <a:endParaRPr lang="en-US" dirty="0">
-              <a:solidFill>
-                <a:schemeClr val="bg1">
-                  <a:lumMod val="50000"/>
-                </a:schemeClr>
-              </a:solidFill>
-            </a:endParaRPr>
+              <a:t>Breaking the circular wait condition</a:t>
+            </a:r>
           </a:p>
           <a:p>
             <a:pPr lvl="1"/>
@@ -17200,7 +17410,7 @@
                   </a:schemeClr>
                 </a:solidFill>
               </a:rPr>
-              <a:t>without no-preemption</a:t>
+              <a:t>Breaking the no-preemption condition</a:t>
             </a:r>
           </a:p>
           <a:p>
@@ -17213,7 +17423,7 @@
                   </a:schemeClr>
                 </a:solidFill>
               </a:rPr>
-              <a:t>without hold-and-wait</a:t>
+              <a:t>Breaking the hold-and-wait condition</a:t>
             </a:r>
           </a:p>
           <a:p>
@@ -17390,14 +17600,7 @@
           <a:p>
             <a:r>
               <a:rPr lang="en-US" dirty="0"/>
-              <a:t>What to read (Main textbook) </a:t>
-            </a:r>
-            <a:br>
-              <a:rPr lang="en-US" dirty="0"/>
-            </a:br>
-            <a:r>
-              <a:rPr lang="en-US" dirty="0"/>
-              <a:t>- This is for both lectures on synchronization</a:t>
+              <a:t>What to read (main textbook) </a:t>
             </a:r>
           </a:p>
         </p:txBody>
@@ -17434,10 +17637,6 @@
             <a:r>
               <a:rPr lang="en-GB" dirty="0"/>
               <a:t>6.1-6.2, 6.5-6.6, 6.7.3-6.7.4</a:t>
-            </a:r>
-            <a:r>
-              <a:rPr lang="en-US"/>
-              <a:t>;</a:t>
             </a:r>
             <a:endParaRPr lang="en-US" dirty="0"/>
           </a:p>
@@ -17974,7 +18173,7 @@
             </a:pPr>
             <a:r>
               <a:rPr lang="en-US" sz="2000" dirty="0"/>
-              <a:t>	Signal c[(i+1) mod n];  </a:t>
+              <a:t>	Signal c[(i+1) mod n]; </a:t>
             </a:r>
             <a:r>
               <a:rPr lang="en-US" sz="2000" dirty="0">
@@ -17984,7 +18183,7 @@
                   </a:schemeClr>
                 </a:solidFill>
               </a:rPr>
-              <a:t>leave right chopstick</a:t>
+              <a:t>// leave right chopstick</a:t>
             </a:r>
           </a:p>
           <a:p>
@@ -18573,7 +18772,7 @@
                   </a:schemeClr>
                 </a:solidFill>
               </a:rPr>
-              <a:t>leave right chopstick</a:t>
+              <a:t>// leave right chopstick</a:t>
             </a:r>
           </a:p>
           <a:p>
@@ -23142,22 +23341,15 @@
                   </a:schemeClr>
                 </a:solidFill>
               </a:rPr>
-              <a:t>without circular wait</a:t>
+              <a:t>Breaking the circular wait condition</a:t>
             </a:r>
           </a:p>
           <a:p>
             <a:pPr lvl="1"/>
             <a:r>
               <a:rPr lang="en-US" dirty="0"/>
-              <a:t>without no-preemption</a:t>
-            </a:r>
-            <a:endParaRPr lang="en-US" dirty="0">
-              <a:solidFill>
-                <a:schemeClr val="bg1">
-                  <a:lumMod val="50000"/>
-                </a:schemeClr>
-              </a:solidFill>
-            </a:endParaRPr>
+              <a:t>Breaking the no-preemption condition</a:t>
+            </a:r>
           </a:p>
           <a:p>
             <a:pPr lvl="1"/>
@@ -23169,7 +23361,7 @@
                   </a:schemeClr>
                 </a:solidFill>
               </a:rPr>
-              <a:t>without hold-and-wait</a:t>
+              <a:t>Breaking the hold-and-wait condition</a:t>
             </a:r>
           </a:p>
           <a:p>
@@ -23665,23 +23857,7 @@
                   <a:prstClr val="black"/>
                 </a:solidFill>
               </a:rPr>
-              <a:t>(c: </a:t>
-            </a:r>
-            <a:r>
-              <a:rPr lang="en-US" sz="1600" dirty="0" err="1">
-                <a:solidFill>
-                  <a:prstClr val="black"/>
-                </a:solidFill>
-              </a:rPr>
-              <a:t>chopstick_structure</a:t>
-            </a:r>
-            <a:r>
-              <a:rPr lang="en-US" sz="1600" dirty="0">
-                <a:solidFill>
-                  <a:prstClr val="black"/>
-                </a:solidFill>
-              </a:rPr>
-              <a:t>):</a:t>
+              <a:t>(c: chopstick_ struct):</a:t>
             </a:r>
           </a:p>
           <a:p>
@@ -23953,7 +24129,7 @@
         </p:nvGrpSpPr>
         <p:grpSpPr>
           <a:xfrm>
-            <a:off x="8004482" y="40525"/>
+            <a:off x="9026977" y="1329753"/>
             <a:ext cx="3166741" cy="1042987"/>
             <a:chOff x="1291257" y="5744918"/>
             <a:chExt cx="3166741" cy="1042987"/>
@@ -24120,7 +24296,7 @@
                   </a:schemeClr>
                 </a:solidFill>
               </a:rPr>
-              <a:t>Dining philosophers: Fight the no-preemption</a:t>
+              <a:t>Dining philosophers: break the no-preemption condition</a:t>
             </a:r>
             <a:endParaRPr lang="sv-SE" sz="3200" b="1" dirty="0">
               <a:solidFill>
@@ -24206,23 +24382,7 @@
                   <a:prstClr val="black"/>
                 </a:solidFill>
               </a:rPr>
-              <a:t>(c : </a:t>
-            </a:r>
-            <a:r>
-              <a:rPr lang="en-US" sz="1600" dirty="0" err="1">
-                <a:solidFill>
-                  <a:prstClr val="black"/>
-                </a:solidFill>
-              </a:rPr>
-              <a:t>chopstick_structure</a:t>
-            </a:r>
-            <a:r>
-              <a:rPr lang="en-US" sz="1600" dirty="0">
-                <a:solidFill>
-                  <a:prstClr val="black"/>
-                </a:solidFill>
-              </a:rPr>
-              <a:t>):</a:t>
+              <a:t>(c : chopstick_ struct):</a:t>
             </a:r>
           </a:p>
           <a:p>
@@ -24368,23 +24528,7 @@
                   <a:prstClr val="black"/>
                 </a:solidFill>
               </a:rPr>
-              <a:t>(c : </a:t>
-            </a:r>
-            <a:r>
-              <a:rPr lang="en-US" sz="1600" dirty="0" err="1">
-                <a:solidFill>
-                  <a:prstClr val="black"/>
-                </a:solidFill>
-              </a:rPr>
-              <a:t>chopstick_structure</a:t>
-            </a:r>
-            <a:r>
-              <a:rPr lang="en-US" sz="1600" dirty="0">
-                <a:solidFill>
-                  <a:prstClr val="black"/>
-                </a:solidFill>
-              </a:rPr>
-              <a:t>):</a:t>
+              <a:t>(c : chopstick_ struct):</a:t>
             </a:r>
           </a:p>
           <a:p>
@@ -24776,7 +24920,6 @@
               <a:spcAft>
                 <a:spcPct val="0"/>
               </a:spcAft>
-              <a:buFont typeface="Arial" panose="020B0604020202020204" pitchFamily="34" charset="0"/>
               <a:buNone/>
               <a:tabLst>
                 <a:tab pos="168275" algn="l"/>
@@ -24823,6 +24966,24 @@
                 </a:solidFill>
               </a:rPr>
               <a:t>; </a:t>
+            </a:r>
+            <a:r>
+              <a:rPr lang="en-US" sz="1600" dirty="0">
+                <a:solidFill>
+                  <a:schemeClr val="bg1">
+                    <a:lumMod val="50000"/>
+                  </a:schemeClr>
+                </a:solidFill>
+              </a:rPr>
+              <a:t>// initially false</a:t>
+            </a:r>
+            <a:r>
+              <a:rPr lang="en-US" sz="1600" dirty="0">
+                <a:solidFill>
+                  <a:prstClr val="black"/>
+                </a:solidFill>
+              </a:rPr>
+              <a:t>  </a:t>
             </a:r>
           </a:p>
           <a:p>
@@ -25676,7 +25837,7 @@
           <a:p>
             <a:r>
               <a:rPr lang="en-US" dirty="0"/>
-              <a:t>Progress: no deadlock … but </a:t>
+              <a:t>Progress? no deadlock … but </a:t>
             </a:r>
             <a:r>
               <a:rPr lang="en-US" dirty="0" err="1"/>
@@ -25690,7 +25851,7 @@
           <a:p>
             <a:r>
               <a:rPr lang="en-US" dirty="0"/>
-              <a:t>Fairness: a process can starve…</a:t>
+              <a:t>Fairness? a process can starve…</a:t>
             </a:r>
           </a:p>
         </p:txBody>
@@ -25812,7 +25973,7 @@
                   </a:schemeClr>
                 </a:solidFill>
               </a:rPr>
-              <a:t>Dining philosophers: Fight the no-preemption</a:t>
+              <a:t>Dining philosophers: break the no-preemption condition</a:t>
             </a:r>
             <a:endParaRPr lang="sv-SE" sz="3200" b="1" dirty="0">
               <a:solidFill>
@@ -26699,7 +26860,7 @@
                   </a:schemeClr>
                 </a:solidFill>
               </a:rPr>
-              <a:t>without circular wait</a:t>
+              <a:t>Breaking the circular wait condition</a:t>
             </a:r>
           </a:p>
           <a:p>
@@ -26712,15 +26873,26 @@
                   </a:schemeClr>
                 </a:solidFill>
               </a:rPr>
-              <a:t>without no-preemption</a:t>
+              <a:t>Breaking the no-preemption condition</a:t>
             </a:r>
           </a:p>
           <a:p>
             <a:pPr lvl="1"/>
             <a:r>
               <a:rPr lang="en-US" dirty="0"/>
-              <a:t>without hold-and-wait</a:t>
-            </a:r>
+              <a:t>Breaking the hold-and-wait condition</a:t>
+            </a:r>
+            <a:r>
+              <a:rPr lang="en-US" dirty="0">
+                <a:solidFill>
+                  <a:schemeClr val="bg1">
+                    <a:lumMod val="50000"/>
+                  </a:schemeClr>
+                </a:solidFill>
+              </a:rPr>
+              <a:t> </a:t>
+            </a:r>
+            <a:endParaRPr lang="en-US" dirty="0"/>
           </a:p>
           <a:p>
             <a:r>
@@ -26915,8 +27087,8 @@
         </p:nvSpPr>
         <p:spPr bwMode="auto">
           <a:xfrm>
-            <a:off x="294184" y="1143001"/>
-            <a:ext cx="4881498" cy="2834196"/>
+            <a:off x="303149" y="1842248"/>
+            <a:ext cx="7352710" cy="2834196"/>
           </a:xfrm>
           <a:prstGeom prst="rect">
             <a:avLst/>
@@ -27077,8 +27249,23 @@
                   <a:prstClr val="black"/>
                 </a:solidFill>
               </a:rPr>
-              <a:t>shared var state[0 .. n-1] in {HUNGRY, THINKING,EATING}</a:t>
-            </a:r>
+              <a:t>shared var state[0 .. n-1] in {HUNGRY, THINKING, EATING} </a:t>
+            </a:r>
+            <a:r>
+              <a:rPr lang="en-US" sz="1600" dirty="0">
+                <a:solidFill>
+                  <a:schemeClr val="bg1">
+                    <a:lumMod val="50000"/>
+                  </a:schemeClr>
+                </a:solidFill>
+              </a:rPr>
+              <a:t>// all initialized as THINKING</a:t>
+            </a:r>
+            <a:endParaRPr lang="en-US" sz="1600" dirty="0">
+              <a:solidFill>
+                <a:prstClr val="black"/>
+              </a:solidFill>
+            </a:endParaRPr>
           </a:p>
           <a:p>
             <a:pPr eaLnBrk="0" fontAlgn="base" hangingPunct="0">
@@ -27362,7 +27549,7 @@
         </p:nvSpPr>
         <p:spPr bwMode="auto">
           <a:xfrm>
-            <a:off x="9256904" y="1143001"/>
+            <a:off x="9463092" y="1143001"/>
             <a:ext cx="2222375" cy="1760894"/>
           </a:xfrm>
           <a:prstGeom prst="rect">
@@ -27464,7 +27651,7 @@
                   <a:schemeClr val="tx1"/>
                 </a:solidFill>
               </a:rPr>
-              <a:t>	state(</a:t>
+              <a:t>	state[</a:t>
             </a:r>
             <a:r>
               <a:rPr lang="en-US" dirty="0" err="1">
@@ -27475,12 +27662,16 @@
               <a:t>i</a:t>
             </a:r>
             <a:r>
+              <a:rPr lang="en-US" dirty="0"/>
+              <a:t>]</a:t>
+            </a:r>
+            <a:r>
               <a:rPr lang="en-US" dirty="0">
                 <a:solidFill>
                   <a:schemeClr val="tx1"/>
                 </a:solidFill>
               </a:rPr>
-              <a:t>) := HUNGRY</a:t>
+              <a:t> := HUNGRY</a:t>
             </a:r>
           </a:p>
           <a:p>
@@ -27572,7 +27763,7 @@
         </p:nvSpPr>
         <p:spPr bwMode="auto">
           <a:xfrm>
-            <a:off x="9256904" y="3073659"/>
+            <a:off x="9463091" y="4676444"/>
             <a:ext cx="2222375" cy="1760894"/>
           </a:xfrm>
           <a:prstGeom prst="rect">
@@ -27678,7 +27869,7 @@
             </a:r>
             <a:r>
               <a:rPr lang="sv-SE" dirty="0"/>
-              <a:t>(i) := THINKING</a:t>
+              <a:t>[i] := THINKING</a:t>
             </a:r>
           </a:p>
           <a:p>
@@ -27791,7 +27982,7 @@
         </p:nvSpPr>
         <p:spPr bwMode="auto">
           <a:xfrm>
-            <a:off x="5301161" y="1143001"/>
+            <a:off x="7862047" y="3062648"/>
             <a:ext cx="3830264" cy="1455043"/>
           </a:xfrm>
           <a:prstGeom prst="rect">
@@ -27907,7 +28098,19 @@
                   <a:schemeClr val="tx1"/>
                 </a:solidFill>
               </a:rPr>
-              <a:t>then {state(k) := EATING ; signal(S[k]) }</a:t>
+              <a:t>then {state[k</a:t>
+            </a:r>
+            <a:r>
+              <a:rPr lang="en-US" dirty="0"/>
+              <a:t>]</a:t>
+            </a:r>
+            <a:r>
+              <a:rPr lang="en-US" dirty="0">
+                <a:solidFill>
+                  <a:schemeClr val="tx1"/>
+                </a:solidFill>
+              </a:rPr>
+              <a:t> := EATING ; signal(S[k]) }</a:t>
             </a:r>
           </a:p>
         </p:txBody>
@@ -27982,7 +28185,7 @@
                   </a:schemeClr>
                 </a:solidFill>
               </a:rPr>
-              <a:t>Dining philosophers: Fight the hold-and-wait</a:t>
+              <a:t>Dining philosophers: Break the hold-and-wait condition</a:t>
             </a:r>
             <a:endParaRPr lang="sv-SE" sz="3200" b="1" dirty="0">
               <a:solidFill>
@@ -28008,7 +28211,7 @@
         </p:nvGrpSpPr>
         <p:grpSpPr>
           <a:xfrm>
-            <a:off x="7859019" y="68783"/>
+            <a:off x="316705" y="830684"/>
             <a:ext cx="3264695" cy="1042987"/>
             <a:chOff x="1291256" y="5638882"/>
             <a:chExt cx="3264695" cy="1042987"/>
@@ -28230,7 +28433,7 @@
               <a:rPr lang="en-US" dirty="0">
                 <a:hlinkClick r:id="rId3"/>
               </a:rPr>
-              <a:t>https://dl.acm.org/doi/pdf/10.1145/62546.62567?casa_token=4uO24jxkwEAAAAAA:jJlAILeISZe5Uu2ERv6O-dTq_0LbSmRpv0beOZ_3vDi50otRS-_HqB30GoWDib1zVQ9jjrhx4w0</a:t>
+              <a:t>https://dl.acm.org/doi/pdf/10.1145/62546.62567</a:t>
             </a:r>
             <a:endParaRPr lang="en-US" dirty="0"/>
           </a:p>
@@ -28353,7 +28556,7 @@
                   </a:schemeClr>
                 </a:solidFill>
               </a:rPr>
-              <a:t>Dining philosophers: Fight the no-preemption</a:t>
+              <a:t>Dining philosophers: Break the hold-and-wait condition</a:t>
             </a:r>
             <a:endParaRPr lang="sv-SE" sz="3200" b="1" dirty="0">
               <a:solidFill>
@@ -28519,7 +28722,7 @@
                   </a:schemeClr>
                 </a:solidFill>
               </a:rPr>
-              <a:t>without circular wait</a:t>
+              <a:t>Breaking the circular wait condition</a:t>
             </a:r>
           </a:p>
           <a:p>
@@ -28532,7 +28735,7 @@
                   </a:schemeClr>
                 </a:solidFill>
               </a:rPr>
-              <a:t>without no-preemption</a:t>
+              <a:t>Breaking the no-preemption condition</a:t>
             </a:r>
           </a:p>
           <a:p>
@@ -28545,7 +28748,7 @@
                   </a:schemeClr>
                 </a:solidFill>
               </a:rPr>
-              <a:t>without hold-and-wait</a:t>
+              <a:t>Breaking the hold-and-wait condition</a:t>
             </a:r>
           </a:p>
           <a:p>
@@ -28753,21 +28956,21 @@
             <a:pPr lvl="1"/>
             <a:r>
               <a:rPr lang="en-US" dirty="0"/>
-              <a:t>without circular wait</a:t>
+              <a:t>Breaking the circular wait condition</a:t>
             </a:r>
           </a:p>
           <a:p>
             <a:pPr lvl="1"/>
             <a:r>
               <a:rPr lang="en-US" dirty="0"/>
-              <a:t>without no-preemption</a:t>
+              <a:t>Breaking the no-preemption condition</a:t>
             </a:r>
           </a:p>
           <a:p>
             <a:pPr lvl="1"/>
             <a:r>
               <a:rPr lang="en-US" dirty="0"/>
-              <a:t>without hold-and-wait</a:t>
+              <a:t>Breaking the hold-and-wait condition</a:t>
             </a:r>
           </a:p>
           <a:p>
@@ -29215,7 +29418,7 @@
         <p:spPr>
           <a:xfrm>
             <a:off x="554023" y="2709254"/>
-            <a:ext cx="11083954" cy="1569660"/>
+            <a:ext cx="11083954" cy="2185214"/>
           </a:xfrm>
           <a:prstGeom prst="rect">
             <a:avLst/>
@@ -29233,7 +29436,14 @@
             <a:pPr marL="90488" lvl="1"/>
             <a:r>
               <a:rPr lang="en-US" sz="2000" dirty="0"/>
-              <a:t>Note: the decentralized scheme generates numbers in non-decreasing order; e.g., 1, 2, 3, 3, 4, 5, 5, 5, 6</a:t>
+              <a:t>The decentralized scheme generates numbers in non-decreasing order; e.g., 1, 2, 3, 3, 4, 5, 5, 5, 6 </a:t>
+            </a:r>
+            <a:br>
+              <a:rPr lang="en-US" sz="2000" dirty="0"/>
+            </a:br>
+            <a:r>
+              <a:rPr lang="en-US" sz="2000" dirty="0"/>
+              <a:t>(note: tickets return to zero, and a later round of threads trying to enter the critical section may start again with tickets with value 1) </a:t>
             </a:r>
           </a:p>
           <a:p>
@@ -29587,25 +29797,7 @@
                 </a:solidFill>
                 <a:sym typeface="Symbol" pitchFamily="18" charset="2"/>
               </a:rPr>
-              <a:t> </a:t>
-            </a:r>
-            <a:r>
-              <a:rPr lang="en-US" sz="1600" dirty="0" err="1">
-                <a:solidFill>
-                  <a:prstClr val="black"/>
-                </a:solidFill>
-                <a:sym typeface="Symbol" pitchFamily="18" charset="2"/>
-              </a:rPr>
-              <a:t>fasle</a:t>
-            </a:r>
-            <a:r>
-              <a:rPr lang="en-US" sz="1600" dirty="0">
-                <a:solidFill>
-                  <a:prstClr val="black"/>
-                </a:solidFill>
-                <a:sym typeface="Symbol" pitchFamily="18" charset="2"/>
-              </a:rPr>
-              <a:t>);</a:t>
+              <a:t> false);</a:t>
             </a:r>
           </a:p>
           <a:p>
@@ -30273,7 +30465,15 @@
           <a:p>
             <a:r>
               <a:rPr lang="en-US" sz="1600" b="1" dirty="0"/>
-              <a:t>Mutex</a:t>
+              <a:t>Mutual </a:t>
+            </a:r>
+            <a:r>
+              <a:rPr lang="en-US" sz="1600" b="1" dirty="0" err="1"/>
+              <a:t>exclustion</a:t>
+            </a:r>
+            <a:r>
+              <a:rPr lang="en-US" sz="1600" b="1" dirty="0"/>
+              <a:t>:</a:t>
             </a:r>
             <a:r>
               <a:rPr lang="en-US" sz="1600" dirty="0"/>
@@ -30307,7 +30507,7 @@
             </a:r>
             <a:r>
               <a:rPr lang="en-US" sz="1600" dirty="0"/>
-              <a:t>: the thread with the smaller number can proceed</a:t>
+              <a:t>: the thread with the smaller (number, thread ID) can proceed</a:t>
             </a:r>
           </a:p>
           <a:p>
@@ -30568,7 +30768,7 @@
                   </a:schemeClr>
                 </a:solidFill>
               </a:rPr>
-              <a:t>without circular wait</a:t>
+              <a:t>Breaking the circular wait condition</a:t>
             </a:r>
           </a:p>
           <a:p>
@@ -30581,7 +30781,7 @@
                   </a:schemeClr>
                 </a:solidFill>
               </a:rPr>
-              <a:t>without no-preemption</a:t>
+              <a:t>Breaking the no-preemption condition</a:t>
             </a:r>
           </a:p>
           <a:p>
@@ -30594,7 +30794,7 @@
                   </a:schemeClr>
                 </a:solidFill>
               </a:rPr>
-              <a:t>without hold-and-wait</a:t>
+              <a:t>Breaking the hold-and-wait condition</a:t>
             </a:r>
           </a:p>
           <a:p>
@@ -30788,7 +30988,7 @@
             </a:pPr>
             <a:r>
               <a:rPr lang="en-US" dirty="0"/>
-              <a:t>Solve this synch problem using semaphores; we require  1. the safety properties mentioned here; 2. progress</a:t>
+              <a:t>Solve this synchronization problem using semaphores, ensuring the presented safety properties and progress</a:t>
             </a:r>
           </a:p>
         </p:txBody>
@@ -31748,7 +31948,7 @@
         <p:spPr>
           <a:xfrm>
             <a:off x="5820571" y="855363"/>
-            <a:ext cx="3133855" cy="4745915"/>
+            <a:ext cx="3133855" cy="4413516"/>
           </a:xfrm>
           <a:prstGeom prst="rect">
             <a:avLst/>
@@ -31810,7 +32010,7 @@
                   <a:prstClr val="black"/>
                 </a:solidFill>
               </a:rPr>
-              <a:t>if I am first in a batch of readers to check</a:t>
+              <a:t>if I am first the first reader trying to access the object</a:t>
             </a:r>
           </a:p>
           <a:p>
@@ -31837,7 +32037,7 @@
                   <a:srgbClr val="C00000"/>
                 </a:solidFill>
               </a:rPr>
-              <a:t>wait until no one accesses the object (else others read, hence go on)</a:t>
+              <a:t>wait until no one is accessing the object</a:t>
             </a:r>
           </a:p>
           <a:p>
@@ -31926,7 +32126,7 @@
                   <a:prstClr val="black"/>
                 </a:solidFill>
               </a:rPr>
-              <a:t> (… + if I am last in a batch of readers who read, tell that </a:t>
+              <a:t>if I am last reader that was accessing the object, tell that </a:t>
             </a:r>
             <a:r>
               <a:rPr lang="en-US" kern="0" dirty="0">
@@ -31934,16 +32134,13 @@
                   <a:srgbClr val="00B050"/>
                 </a:solidFill>
               </a:rPr>
-              <a:t>no one accesses the object </a:t>
-            </a:r>
-            <a:r>
-              <a:rPr lang="en-US" kern="0" dirty="0">
-                <a:solidFill>
-                  <a:prstClr val="black"/>
-                </a:solidFill>
-              </a:rPr>
-              <a:t>…)</a:t>
-            </a:r>
+              <a:t>no one is accessing the object</a:t>
+            </a:r>
+            <a:endParaRPr lang="en-US" kern="0" dirty="0">
+              <a:solidFill>
+                <a:prstClr val="black"/>
+              </a:solidFill>
+            </a:endParaRPr>
           </a:p>
         </p:txBody>
       </p:sp>
@@ -31961,8 +32158,8 @@
         </p:nvSpPr>
         <p:spPr>
           <a:xfrm>
-            <a:off x="3287859" y="1538505"/>
-            <a:ext cx="1622993" cy="3471720"/>
+            <a:off x="3030071" y="1538505"/>
+            <a:ext cx="1880781" cy="3471720"/>
           </a:xfrm>
           <a:prstGeom prst="rect">
             <a:avLst/>
@@ -32032,7 +32229,7 @@
                   <a:srgbClr val="C00000"/>
                 </a:solidFill>
               </a:rPr>
-              <a:t>wait  until no one accesses the object</a:t>
+              <a:t>wait  until no one is accessing the object</a:t>
             </a:r>
           </a:p>
           <a:p>
@@ -32102,7 +32299,7 @@
                   <a:srgbClr val="00B050"/>
                 </a:solidFill>
               </a:rPr>
-              <a:t>no longer / no one accessing the object</a:t>
+              <a:t>no one is accessing the object</a:t>
             </a:r>
           </a:p>
         </p:txBody>
@@ -32302,7 +32499,7 @@
         <p:spPr>
           <a:xfrm flipV="1">
             <a:off x="8020801" y="2758085"/>
-            <a:ext cx="0" cy="1238880"/>
+            <a:ext cx="0" cy="971233"/>
           </a:xfrm>
           <a:prstGeom prst="straightConnector1">
             <a:avLst/>
@@ -32396,7 +32593,7 @@
         </p:nvSpPr>
         <p:spPr>
           <a:xfrm>
-            <a:off x="5871065" y="4612437"/>
+            <a:off x="5871065" y="4334531"/>
             <a:ext cx="3260326" cy="902243"/>
           </a:xfrm>
           <a:prstGeom prst="rect">
@@ -32465,7 +32662,7 @@
         </p:blipFill>
         <p:spPr>
           <a:xfrm>
-            <a:off x="8247338" y="1707287"/>
+            <a:off x="8570068" y="1707287"/>
             <a:ext cx="438063" cy="438063"/>
           </a:xfrm>
           <a:prstGeom prst="rect">
@@ -32504,7 +32701,7 @@
         </p:blipFill>
         <p:spPr>
           <a:xfrm>
-            <a:off x="8681819" y="5088564"/>
+            <a:off x="8942897" y="4785652"/>
             <a:ext cx="438063" cy="438063"/>
           </a:xfrm>
           <a:prstGeom prst="rect">
@@ -33190,9 +33387,9 @@
         <p:grpSpPr>
           <a:xfrm>
             <a:off x="4904226" y="1853287"/>
-            <a:ext cx="6142091" cy="3339964"/>
+            <a:ext cx="6767821" cy="3339964"/>
             <a:chOff x="3033610" y="1759019"/>
-            <a:chExt cx="6142091" cy="3339964"/>
+            <a:chExt cx="6767821" cy="3339964"/>
           </a:xfrm>
         </p:grpSpPr>
         <p:sp>
@@ -33206,7 +33403,7 @@
           <p:spPr bwMode="auto">
             <a:xfrm>
               <a:off x="3033610" y="1873497"/>
-              <a:ext cx="6006695" cy="3225486"/>
+              <a:ext cx="6767821" cy="3225486"/>
             </a:xfrm>
             <a:prstGeom prst="rect">
               <a:avLst/>
@@ -33413,7 +33610,7 @@
               </a:r>
               <a:r>
                 <a:rPr lang="en-US" dirty="0"/>
-                <a:t>if </a:t>
+                <a:t> </a:t>
               </a:r>
               <a:r>
                 <a:rPr lang="en-US" dirty="0" err="1"/>
@@ -33421,7 +33618,31 @@
               </a:r>
               <a:r>
                 <a:rPr lang="en-US" dirty="0"/>
-                <a:t>++ == 1 then wait(</a:t>
+                <a:t>++;</a:t>
+              </a:r>
+              <a:r>
+                <a:rPr lang="en-US" dirty="0">
+                  <a:solidFill>
+                    <a:schemeClr val="bg1">
+                      <a:lumMod val="50000"/>
+                    </a:schemeClr>
+                  </a:solidFill>
+                </a:rPr>
+                <a:t>	</a:t>
+              </a:r>
+            </a:p>
+            <a:p>
+              <a:r>
+                <a:rPr lang="en-US" dirty="0"/>
+                <a:t>	if </a:t>
+              </a:r>
+              <a:r>
+                <a:rPr lang="en-US" dirty="0" err="1"/>
+                <a:t>rc</a:t>
+              </a:r>
+              <a:r>
+                <a:rPr lang="en-US" dirty="0"/>
+                <a:t> == 1 then wait(</a:t>
               </a:r>
               <a:r>
                 <a:rPr lang="en-US" dirty="0" err="1"/>
@@ -33529,6 +33750,20 @@
             <a:p>
               <a:r>
                 <a:rPr lang="en-US" dirty="0"/>
+                <a:t>	</a:t>
+              </a:r>
+              <a:r>
+                <a:rPr lang="en-US" dirty="0" err="1"/>
+                <a:t>rc</a:t>
+              </a:r>
+              <a:r>
+                <a:rPr lang="en-US" dirty="0"/>
+                <a:t>--</a:t>
+              </a:r>
+            </a:p>
+            <a:p>
+              <a:r>
+                <a:rPr lang="en-US" dirty="0"/>
                 <a:t>	if </a:t>
               </a:r>
               <a:r>
@@ -33537,7 +33772,7 @@
               </a:r>
               <a:r>
                 <a:rPr lang="en-US" dirty="0"/>
-                <a:t>--  == 0 then signal(</a:t>
+                <a:t>  == 0 then signal(</a:t>
               </a:r>
               <a:r>
                 <a:rPr lang="en-US" dirty="0" err="1"/>
@@ -34114,7 +34349,7 @@
                   </a:schemeClr>
                 </a:solidFill>
               </a:rPr>
-              <a:t>without circular wait</a:t>
+              <a:t>Breaking the circular wait condition</a:t>
             </a:r>
           </a:p>
           <a:p>
@@ -34127,7 +34362,7 @@
                   </a:schemeClr>
                 </a:solidFill>
               </a:rPr>
-              <a:t>without no-preemption</a:t>
+              <a:t>Breaking the no-preemption condition</a:t>
             </a:r>
           </a:p>
           <a:p>
@@ -34140,7 +34375,7 @@
                   </a:schemeClr>
                 </a:solidFill>
               </a:rPr>
-              <a:t>without hold-and-wait</a:t>
+              <a:t>Breaking the hold-and-wait condition</a:t>
             </a:r>
           </a:p>
           <a:p>
@@ -34447,7 +34682,15 @@
                   <a:schemeClr val="tx1"/>
                 </a:solidFill>
               </a:rPr>
-              <a:t>Banker’s algorithm[Dijkstra]</a:t>
+              <a:t>Banker’s algorithm [Dijkstra, 1965]</a:t>
+            </a:r>
+            <a:r>
+              <a:rPr lang="en-US" sz="2000" dirty="0">
+                <a:solidFill>
+                  <a:schemeClr val="tx1"/>
+                </a:solidFill>
+              </a:rPr>
+              <a:t> can be used to decide if a resource request can be granted safely</a:t>
             </a:r>
             <a:endParaRPr lang="en-US" sz="2000" dirty="0">
               <a:solidFill>
@@ -34730,7 +34973,15 @@
             <a:pPr lvl="1"/>
             <a:r>
               <a:rPr lang="en-US" sz="2000" i="1" dirty="0"/>
-              <a:t>e.g., CPU, memory space, I/O devices, files</a:t>
+              <a:t>e.g</a:t>
+            </a:r>
+            <a:r>
+              <a:rPr lang="en-US" sz="2000" i="1"/>
+              <a:t>., I</a:t>
+            </a:r>
+            <a:r>
+              <a:rPr lang="en-US" sz="2000" i="1" dirty="0"/>
+              <a:t>/O devices, files</a:t>
             </a:r>
           </a:p>
           <a:p>
@@ -34900,7 +35151,7 @@
                   <a:srgbClr val="C00000"/>
                 </a:solidFill>
               </a:rPr>
-              <a:t>resources types </a:t>
+              <a:t>resource types </a:t>
             </a:r>
           </a:p>
           <a:p>
@@ -34921,7 +35172,7 @@
                   <a:srgbClr val="C00000"/>
                 </a:solidFill>
               </a:rPr>
-              <a:t>request edge: </a:t>
+              <a:t>claim edge: </a:t>
             </a:r>
             <a:r>
               <a:rPr lang="en-US" sz="2000" i="1" dirty="0"/>
@@ -35855,7 +36106,7 @@
                   </a:schemeClr>
                 </a:solidFill>
               </a:rPr>
-              <a:t>without circular wait</a:t>
+              <a:t>Breaking the circular wait condition</a:t>
             </a:r>
           </a:p>
           <a:p>
@@ -35868,7 +36119,7 @@
                   </a:schemeClr>
                 </a:solidFill>
               </a:rPr>
-              <a:t>without no-preemption</a:t>
+              <a:t>Breaking the no-preemption condition</a:t>
             </a:r>
           </a:p>
           <a:p>
@@ -35881,7 +36132,7 @@
                   </a:schemeClr>
                 </a:solidFill>
               </a:rPr>
-              <a:t>without hold-and-wait</a:t>
+              <a:t>Breaking the hold-and-wait condition </a:t>
             </a:r>
           </a:p>
           <a:p>
@@ -38524,7 +38775,7 @@
             </a:pPr>
             <a:r>
               <a:rPr lang="en-US" sz="2000" b="1" dirty="0"/>
-              <a:t>Using: primitives</a:t>
+              <a:t>By using primitives …</a:t>
             </a:r>
           </a:p>
           <a:p>
@@ -38586,13 +38837,13 @@
             </a:pPr>
             <a:r>
               <a:rPr lang="en-US" sz="2000" b="1" dirty="0"/>
-              <a:t>Construct: objects / solve specific synchronization problems</a:t>
+              <a:t>… we want to construct objects / solve specific synchronization problems</a:t>
             </a:r>
           </a:p>
           <a:p>
             <a:r>
               <a:rPr lang="en-US" sz="2000" dirty="0"/>
-              <a:t>2 thread CS, n-thread-CS</a:t>
+              <a:t>2-thread CS, n-thread CS</a:t>
             </a:r>
           </a:p>
           <a:p>
@@ -38888,7 +39139,7 @@
                   </a:schemeClr>
                 </a:solidFill>
               </a:rPr>
-              <a:t>the Bounded buffer producer-consumer problem</a:t>
+              <a:t>The Bounded buffer producer-consumer problem</a:t>
             </a:r>
             <a:endParaRPr lang="sv-SE" sz="3600" b="1" dirty="0">
               <a:solidFill>
@@ -39470,8 +39721,8 @@
         </p:nvSpPr>
         <p:spPr bwMode="auto">
           <a:xfrm>
-            <a:off x="3338445" y="3941987"/>
-            <a:ext cx="5034282" cy="430922"/>
+            <a:off x="2905834" y="3941987"/>
+            <a:ext cx="5727177" cy="430922"/>
           </a:xfrm>
           <a:prstGeom prst="rect">
             <a:avLst/>
@@ -39517,7 +39768,7 @@
                   <a:srgbClr val="FF0000"/>
                 </a:solidFill>
               </a:rPr>
-              <a:t>Solve this synch problem using semaphores</a:t>
+              <a:t>Solve this synchronization problem using semaphores</a:t>
             </a:r>
           </a:p>
           <a:p>
@@ -39789,7 +40040,7 @@
         <p:spPr>
           <a:xfrm>
             <a:off x="3801571" y="1641179"/>
-            <a:ext cx="4095108" cy="646331"/>
+            <a:ext cx="4095108" cy="923330"/>
           </a:xfrm>
           <a:prstGeom prst="rect">
             <a:avLst/>
@@ -39832,7 +40083,7 @@
                   <a:prstClr val="black"/>
                 </a:solidFill>
               </a:rPr>
-              <a:t> items; accessing common entries is a </a:t>
+              <a:t>items; the code that accesses the shared buffer and its metadata is a </a:t>
             </a:r>
             <a:r>
               <a:rPr lang="en-US" b="1" kern="0" dirty="0">
@@ -41859,7 +42110,7 @@
                   <a:prstClr val="black"/>
                 </a:solidFill>
               </a:rPr>
-              <a:t>General semaphore </a:t>
+              <a:t>Counting semaphore </a:t>
             </a:r>
             <a:r>
               <a:rPr lang="en-US" sz="1600" kern="0" dirty="0">
@@ -41896,7 +42147,7 @@
                   <a:prstClr val="black"/>
                 </a:solidFill>
               </a:rPr>
-              <a:t>General semaphore </a:t>
+              <a:t>Counting semaphore </a:t>
             </a:r>
             <a:r>
               <a:rPr lang="en-US" sz="1600" kern="0" dirty="0">
@@ -42883,7 +43134,7 @@
                   <a:schemeClr val="accent1"/>
                 </a:solidFill>
               </a:rPr>
-              <a:t>wait(buffer-has-items)</a:t>
+              <a:t>wait(buffer-has-items);</a:t>
             </a:r>
           </a:p>
           <a:p>
@@ -43154,7 +43405,7 @@
                   </a:schemeClr>
                 </a:solidFill>
               </a:rPr>
-              <a:t>without circular wait</a:t>
+              <a:t>Breaking the circular wait condition</a:t>
             </a:r>
           </a:p>
           <a:p>
@@ -43167,7 +43418,7 @@
                   </a:schemeClr>
                 </a:solidFill>
               </a:rPr>
-              <a:t>without no-preemption</a:t>
+              <a:t>Breaking the no-preemption condition</a:t>
             </a:r>
           </a:p>
           <a:p>
@@ -43180,7 +43431,7 @@
                   </a:schemeClr>
                 </a:solidFill>
               </a:rPr>
-              <a:t>without hold-and-wait</a:t>
+              <a:t>Breaking the hold-and-wait condition</a:t>
             </a:r>
           </a:p>
           <a:p>

--- a/synchronization_part_2/synchronization_part_2.pptx
+++ b/synchronization_part_2/synchronization_part_2.pptx
@@ -3981,7 +3981,7 @@
           <a:p>
             <a:r>
               <a:rPr lang="en-US" dirty="0"/>
-              <a:t>[c] If the OS decides to run P2, P2 might request and get R2, which in this case creates a circular loop, and this might mean deadlock (so from a safe state the OS switches to an unsafe state)</a:t>
+              <a:t>[c] If the OS decides to run P2, P2 might request but should not get R2 (that could lead to a circular loop, and that might mean deadlock - from a safe state the OS switches to an unsafe state)</a:t>
             </a:r>
           </a:p>
           <a:p>
@@ -4232,7 +4232,7 @@
           <a:p>
             <a:r>
               <a:rPr lang="en-US" dirty="0"/>
-              <a:t>Please notice that the OS has an alternative to prevent a deadlock from happening: that of being able to detect a deadlock as happened and then resolve it. In other words, the OS can decide to be reactive rather than proactive.</a:t>
+              <a:t>Please notice that the OS has an alternative to prevent a deadlock from happening: that of being able to detect that a deadlock has happened and then resolve it. In other words, the OS can decide to be reactive rather than proactive.</a:t>
             </a:r>
           </a:p>
           <a:p>
@@ -4241,7 +4241,7 @@
           <a:p>
             <a:r>
               <a:rPr lang="en-US" dirty="0"/>
-              <a:t>In that case, there can be two ways out. The first one is to terminate the process that has caused a deadlock. Eventually, once one or more processes are terminated, enough resources will be available and the remaining processes will be able to continue.</a:t>
+              <a:t>In that case, there can be two ways out. The first one is to terminate the process that is involved in the deadlock. Eventually, once one or more processes are terminated, enough resources will be available and the remaining processes will be able to continue.</a:t>
             </a:r>
           </a:p>
           <a:p>
@@ -4254,6 +4254,7 @@
             </a:r>
           </a:p>
           <a:p>
+            <a:pPr algn="r"/>
             <a:endParaRPr lang="en-US" dirty="0"/>
           </a:p>
           <a:p>
@@ -34601,8 +34602,21 @@
                   <a:srgbClr val="C00000"/>
                 </a:solidFill>
               </a:rPr>
-              <a:t>Resource request &amp; allocation is managed by the OS</a:t>
-            </a:r>
+              <a:t>Resource request &amp; allocation is managed by the OS (note: we are talking of resource-request admission, not </a:t>
+            </a:r>
+            <a:r>
+              <a:rPr lang="en-US" sz="2000" b="1">
+                <a:solidFill>
+                  <a:srgbClr val="C00000"/>
+                </a:solidFill>
+              </a:rPr>
+              <a:t>CPU scheduling!)</a:t>
+            </a:r>
+            <a:endParaRPr lang="en-US" sz="2000" b="1" dirty="0">
+              <a:solidFill>
+                <a:srgbClr val="C00000"/>
+              </a:solidFill>
+            </a:endParaRPr>
           </a:p>
           <a:p>
             <a:pPr marL="0" indent="0">
@@ -35567,23 +35581,7 @@
                   <a:srgbClr val="C00000"/>
                 </a:solidFill>
               </a:rPr>
-              <a:t>Deadlock-avoidance </a:t>
-            </a:r>
-            <a:r>
-              <a:rPr lang="en-US" sz="2000" b="1" i="1" dirty="0" err="1">
-                <a:solidFill>
-                  <a:srgbClr val="C00000"/>
-                </a:solidFill>
-              </a:rPr>
-              <a:t>algo</a:t>
-            </a:r>
-            <a:r>
-              <a:rPr lang="en-US" sz="2000" b="1" i="1" dirty="0">
-                <a:solidFill>
-                  <a:srgbClr val="C00000"/>
-                </a:solidFill>
-              </a:rPr>
-              <a:t>, run by OS</a:t>
+              <a:t>Deadlock-avoidance algorithm, run by the OS</a:t>
             </a:r>
             <a:r>
               <a:rPr lang="en-US" sz="2000" dirty="0">
@@ -35719,7 +35717,7 @@
               <a:rPr lang="en-US" sz="2000" dirty="0">
                 <a:sym typeface="Symbol" pitchFamily="18" charset="2"/>
               </a:rPr>
-              <a:t>occur (i.e., later, if all procs request their maximum and no-one can be granted)</a:t>
+              <a:t>occur (i.e., later, if all processes request their maximum and no one can be granted)</a:t>
             </a:r>
           </a:p>
           <a:p>
@@ -35775,7 +35773,7 @@
                 </a:solidFill>
                 <a:sym typeface="Symbol" pitchFamily="18" charset="2"/>
               </a:rPr>
-              <a:t>suspending processes with risky requests</a:t>
+              <a:t>delaying processes with risky requests</a:t>
             </a:r>
             <a:r>
               <a:rPr lang="en-US" sz="2000" dirty="0">
@@ -36646,9 +36644,9 @@
         <p:grpSpPr>
           <a:xfrm>
             <a:off x="8170437" y="818140"/>
-            <a:ext cx="3898776" cy="4722684"/>
+            <a:ext cx="3898776" cy="5276681"/>
             <a:chOff x="8170437" y="818140"/>
-            <a:chExt cx="3898776" cy="4722684"/>
+            <a:chExt cx="3898776" cy="5276681"/>
           </a:xfrm>
         </p:grpSpPr>
         <p:sp>
@@ -36660,7 +36658,7 @@
           <p:spPr>
             <a:xfrm>
               <a:off x="8170437" y="4525161"/>
-              <a:ext cx="3898776" cy="1015663"/>
+              <a:ext cx="3898776" cy="1569660"/>
             </a:xfrm>
             <a:prstGeom prst="rect">
               <a:avLst/>
@@ -36716,7 +36714,7 @@
                     </a:srgbClr>
                   </a:solidFill>
                 </a:rPr>
-                <a:t>i.e., granting the P2-R2 request should not be made until P1 finishes</a:t>
+                <a:t>i.e., granting the P2-R2 request should not be made until P1 finishes (but P2 could run, the key point here is not granting R2 to P2)</a:t>
               </a:r>
               <a:endParaRPr lang="sv-SE" sz="1400" dirty="0">
                 <a:solidFill>
@@ -37606,7 +37604,7 @@
                   </a:schemeClr>
                 </a:solidFill>
               </a:rPr>
-              <a:t>// i.e., bank will have not enough to let its customers finish and return their loans in case someone requests its max needs</a:t>
+              <a:t>// i.e., the bank will have not enough money to let its customers finish and return their loans in case someone requests its max needs</a:t>
             </a:r>
             <a:endParaRPr lang="en-US" sz="2000" dirty="0">
               <a:solidFill>
@@ -37678,15 +37676,7 @@
                   <a:srgbClr val="C00000"/>
                 </a:solidFill>
               </a:rPr>
-              <a:t> enough resources are free-</a:t>
-            </a:r>
-            <a:r>
-              <a:rPr lang="en-US" sz="2000" i="1" dirty="0" err="1">
-                <a:solidFill>
-                  <a:srgbClr val="C00000"/>
-                </a:solidFill>
-              </a:rPr>
-              <a:t>ed</a:t>
+              <a:t> enough resources are freed</a:t>
             </a:r>
             <a:r>
               <a:rPr lang="en-US" sz="2000" dirty="0">
@@ -37704,7 +37694,7 @@
                   </a:schemeClr>
                 </a:solidFill>
               </a:rPr>
-              <a:t>// by processes that will terminate in the meanwhile</a:t>
+              <a:t>// by processes that where holding them</a:t>
             </a:r>
           </a:p>
           <a:p>
@@ -37734,7 +37724,7 @@
             </a:pPr>
             <a:r>
               <a:rPr lang="en-US" sz="2000" dirty="0"/>
-              <a:t>Banker’s algo gives criterion that can be checked in linear time using the </a:t>
+              <a:t>Banker’s algo gives criterion that can be checked using the </a:t>
             </a:r>
             <a:r>
               <a:rPr lang="en-US" sz="2000" dirty="0">
@@ -38024,7 +38014,9 @@
           </a:fontRef>
         </p:style>
         <p:txBody>
-          <a:bodyPr/>
+          <a:bodyPr>
+            <a:normAutofit fontScale="92500" lnSpcReduction="10000"/>
+          </a:bodyPr>
           <a:lstStyle/>
           <a:p>
             <a:pPr marL="0" indent="0">
@@ -38059,7 +38051,7 @@
             </a:r>
             <a:r>
               <a:rPr lang="en-US" sz="2000" dirty="0"/>
-              <a:t> a deadlock state and when detected (e.g., through detection of cyclical waits), </a:t>
+              <a:t> the system to enter a deadlocked state and when detected (e.g., through detection of cyclical waits when each resource type has one instance), </a:t>
             </a:r>
             <a:r>
               <a:rPr lang="en-US" sz="2000" i="1" dirty="0">
@@ -38399,7 +38391,7 @@
             </a:r>
             <a:r>
               <a:rPr lang="en-US" sz="2000" dirty="0"/>
-              <a:t>until deadlock is eliminated.</a:t>
+              <a:t>until the deadlock is eliminated.</a:t>
             </a:r>
           </a:p>
           <a:p>
@@ -38407,20 +38399,13 @@
               <a:buFont typeface="Arial" panose="020B0604020202020204" pitchFamily="34" charset="0"/>
               <a:buAutoNum type="arabicParenBoth"/>
             </a:pPr>
-            <a:endParaRPr lang="en-US" sz="2000" dirty="0"/>
-          </a:p>
-          <a:p>
-            <a:pPr marL="0" indent="0">
-              <a:buFont typeface="Arial" panose="020B0604020202020204" pitchFamily="34" charset="0"/>
-              <a:buNone/>
-            </a:pPr>
             <a:r>
               <a:rPr lang="en-US" sz="2000" b="1" dirty="0">
                 <a:solidFill>
                   <a:srgbClr val="C00000"/>
                 </a:solidFill>
               </a:rPr>
-              <a:t>(2) Resource Preemption: </a:t>
+              <a:t>Resource Preemption: </a:t>
             </a:r>
             <a:r>
               <a:rPr lang="en-US" sz="2000" dirty="0">
@@ -38432,7 +38417,7 @@
             </a:r>
             <a:r>
               <a:rPr lang="en-US" sz="2000" dirty="0"/>
-              <a:t>– return to some safe state, restart process from that state </a:t>
+              <a:t>– return to some safe state, restart process from that state (only for suitable resources and processes) </a:t>
             </a:r>
           </a:p>
           <a:p>
@@ -38651,7 +38636,7 @@
                   <a:prstClr val="black"/>
                 </a:solidFill>
               </a:rPr>
-              <a:t>Must decide on selection criteria (cost, starvation risks, …)</a:t>
+              <a:t>Must decide on a selection criteria (cost, starvation risks, …)</a:t>
             </a:r>
             <a:endParaRPr lang="en-US" sz="2000" b="1" dirty="0">
               <a:solidFill>
